--- a/Operator_Guides/Enterprise_Architect_Role_Charter.pptx
+++ b/Operator_Guides/Enterprise_Architect_Role_Charter.pptx
@@ -8849,7 +8849,7 @@
                 </a:solidFill>
                 <a:latin typeface="Calibri"/>
               </a:rPr>
-              <a:t>— self-contained per-connector chassis — no shared blast radius</a:t>
+              <a:t>— one shared chassis referenced by all five · shared blast radius, gated on every PR · 67 divergences declared</a:t>
             </a:r>
           </a:p>
           <a:p>
@@ -9926,7 +9926,7 @@
                 </a:solidFill>
                 <a:latin typeface="Calibri"/>
               </a:rPr>
-              <a:t>— 4,824 automated tests, 0 warnings — the strategy is demonstrated, not asserted</a:t>
+              <a:t>— 5,445 automated tests, 0 skipped, green on Windows and Linux — the strategy is demonstrated, not asserted</a:t>
             </a:r>
           </a:p>
         </p:txBody>
